--- a/docs/ユーザ手順書.pptx
+++ b/docs/ユーザ手順書.pptx
@@ -6845,7 +6845,7 @@
                 <a:latin typeface="游ゴシック"/>
                 <a:ea typeface="游ゴシック"/>
               </a:rPr>
-              <a:t>③ 「Personal Access Token」に、コピーしたトークンを貼り付け、「再認証する」を押します。</a:t>
+              <a:t>③ 「Personal Access Token」に、コピーしたトークンを貼り付け、「接続を確認する」を押します。</a:t>
             </a:r>
           </a:p>
           <a:p>
@@ -6982,7 +6982,7 @@
                 <a:latin typeface="游ゴシック"/>
                 <a:ea typeface="游ゴシック"/>
               </a:rPr>
-              <a:t>一覧にない場合は、NewtonXにログインするURL https://xxx.newton-x.net の xxx 部分です。誤ると「認証済み」表示のままエラーになります。</a:t>
+              <a:t>一覧にない場合は、NewtonXにログインするURL https://xxx.newton-x.net の xxx 部分です。Hostの形式やPATに誤りがあると、「接続できませんでした」と表示されます。</a:t>
             </a:r>
           </a:p>
         </p:txBody>
